--- a/ChatBLT_ProjectReport.pptx
+++ b/ChatBLT_ProjectReport.pptx
@@ -33,8 +33,11 @@
     <p:sldId id="281" r:id="rId27"/>
     <p:sldId id="282" r:id="rId28"/>
     <p:sldId id="283" r:id="rId29"/>
-    <p:sldId id="284" r:id="rId30"/>
-    <p:sldId id="285" r:id="rId31"/>
+    <p:sldId id="286" r:id="rId30"/>
+    <p:sldId id="287" r:id="rId31"/>
+    <p:sldId id="288" r:id="rId32"/>
+    <p:sldId id="284" r:id="rId33"/>
+    <p:sldId id="285" r:id="rId34"/>
   </p:sldIdLst>
   <p:sldSz cx="12192000" cy="6858000"/>
   <p:notesSz cx="6858000" cy="9144000"/>
@@ -288,7 +291,7 @@
           <a:p>
             <a:fld id="{BAA6759A-2932-41A6-931C-59D6E0CDFCCC}" type="datetimeFigureOut">
               <a:rPr lang="en-US" smtClean="0"/>
-              <a:t>5/4/2025</a:t>
+              <a:t>5/7/2025</a:t>
             </a:fld>
             <a:endParaRPr lang="en-US"/>
           </a:p>
@@ -486,7 +489,7 @@
           <a:p>
             <a:fld id="{BAA6759A-2932-41A6-931C-59D6E0CDFCCC}" type="datetimeFigureOut">
               <a:rPr lang="en-US" smtClean="0"/>
-              <a:t>5/4/2025</a:t>
+              <a:t>5/7/2025</a:t>
             </a:fld>
             <a:endParaRPr lang="en-US"/>
           </a:p>
@@ -694,7 +697,7 @@
           <a:p>
             <a:fld id="{BAA6759A-2932-41A6-931C-59D6E0CDFCCC}" type="datetimeFigureOut">
               <a:rPr lang="en-US" smtClean="0"/>
-              <a:t>5/4/2025</a:t>
+              <a:t>5/7/2025</a:t>
             </a:fld>
             <a:endParaRPr lang="en-US"/>
           </a:p>
@@ -892,7 +895,7 @@
           <a:p>
             <a:fld id="{BAA6759A-2932-41A6-931C-59D6E0CDFCCC}" type="datetimeFigureOut">
               <a:rPr lang="en-US" smtClean="0"/>
-              <a:t>5/4/2025</a:t>
+              <a:t>5/7/2025</a:t>
             </a:fld>
             <a:endParaRPr lang="en-US"/>
           </a:p>
@@ -1167,7 +1170,7 @@
           <a:p>
             <a:fld id="{BAA6759A-2932-41A6-931C-59D6E0CDFCCC}" type="datetimeFigureOut">
               <a:rPr lang="en-US" smtClean="0"/>
-              <a:t>5/4/2025</a:t>
+              <a:t>5/7/2025</a:t>
             </a:fld>
             <a:endParaRPr lang="en-US"/>
           </a:p>
@@ -1432,7 +1435,7 @@
           <a:p>
             <a:fld id="{BAA6759A-2932-41A6-931C-59D6E0CDFCCC}" type="datetimeFigureOut">
               <a:rPr lang="en-US" smtClean="0"/>
-              <a:t>5/4/2025</a:t>
+              <a:t>5/7/2025</a:t>
             </a:fld>
             <a:endParaRPr lang="en-US"/>
           </a:p>
@@ -1844,7 +1847,7 @@
           <a:p>
             <a:fld id="{BAA6759A-2932-41A6-931C-59D6E0CDFCCC}" type="datetimeFigureOut">
               <a:rPr lang="en-US" smtClean="0"/>
-              <a:t>5/4/2025</a:t>
+              <a:t>5/7/2025</a:t>
             </a:fld>
             <a:endParaRPr lang="en-US"/>
           </a:p>
@@ -1985,7 +1988,7 @@
           <a:p>
             <a:fld id="{BAA6759A-2932-41A6-931C-59D6E0CDFCCC}" type="datetimeFigureOut">
               <a:rPr lang="en-US" smtClean="0"/>
-              <a:t>5/4/2025</a:t>
+              <a:t>5/7/2025</a:t>
             </a:fld>
             <a:endParaRPr lang="en-US"/>
           </a:p>
@@ -2098,7 +2101,7 @@
           <a:p>
             <a:fld id="{BAA6759A-2932-41A6-931C-59D6E0CDFCCC}" type="datetimeFigureOut">
               <a:rPr lang="en-US" smtClean="0"/>
-              <a:t>5/4/2025</a:t>
+              <a:t>5/7/2025</a:t>
             </a:fld>
             <a:endParaRPr lang="en-US"/>
           </a:p>
@@ -2409,7 +2412,7 @@
           <a:p>
             <a:fld id="{BAA6759A-2932-41A6-931C-59D6E0CDFCCC}" type="datetimeFigureOut">
               <a:rPr lang="en-US" smtClean="0"/>
-              <a:t>5/4/2025</a:t>
+              <a:t>5/7/2025</a:t>
             </a:fld>
             <a:endParaRPr lang="en-US"/>
           </a:p>
@@ -2697,7 +2700,7 @@
           <a:p>
             <a:fld id="{BAA6759A-2932-41A6-931C-59D6E0CDFCCC}" type="datetimeFigureOut">
               <a:rPr lang="en-US" smtClean="0"/>
-              <a:t>5/4/2025</a:t>
+              <a:t>5/7/2025</a:t>
             </a:fld>
             <a:endParaRPr lang="en-US"/>
           </a:p>
@@ -2938,7 +2941,7 @@
           <a:p>
             <a:fld id="{BAA6759A-2932-41A6-931C-59D6E0CDFCCC}" type="datetimeFigureOut">
               <a:rPr lang="en-US" smtClean="0"/>
-              <a:t>5/4/2025</a:t>
+              <a:t>5/7/2025</a:t>
             </a:fld>
             <a:endParaRPr lang="en-US"/>
           </a:p>
@@ -4874,7 +4877,7 @@
             </a:r>
             <a:r>
               <a:rPr lang="en-US" dirty="0"/>
-              <a:t>.’</a:t>
+              <a:t>.’  For our optimizer, we are using ‘Adam’.</a:t>
             </a:r>
           </a:p>
         </p:txBody>
@@ -6524,7 +6527,7 @@
           <a:p>
             <a:r>
               <a:rPr lang="en-US" dirty="0"/>
-              <a:t>Best/Worst Model’s Plots Compared to the Truth Values</a:t>
+              <a:t>Best/Worst Models’ Plots Compared to the Truth Values</a:t>
             </a:r>
           </a:p>
         </p:txBody>
@@ -6685,7 +6688,13 @@
   <p:cSld>
     <p:spTree>
       <p:nvGrpSpPr>
-        <p:cNvPr id="1" name=""/>
+        <p:cNvPr id="1" name="">
+          <a:extLst>
+            <a:ext uri="{FF2B5EF4-FFF2-40B4-BE49-F238E27FC236}">
+              <a16:creationId xmlns:a16="http://schemas.microsoft.com/office/drawing/2014/main" id="{C57D4011-8D00-D6F2-7F57-1A15A5AC804E}"/>
+            </a:ext>
+          </a:extLst>
+        </p:cNvPr>
         <p:cNvGrpSpPr/>
         <p:nvPr/>
       </p:nvGrpSpPr>
@@ -6702,7 +6711,7 @@
           <p:cNvPr id="2" name="Title 1">
             <a:extLst>
               <a:ext uri="{FF2B5EF4-FFF2-40B4-BE49-F238E27FC236}">
-                <a16:creationId xmlns:a16="http://schemas.microsoft.com/office/drawing/2014/main" id="{B4D94AE6-0DAB-25A2-52EA-C2C4643A9865}"/>
+                <a16:creationId xmlns:a16="http://schemas.microsoft.com/office/drawing/2014/main" id="{1DD0DCED-F68D-85B8-8071-3430D7C35A20}"/>
               </a:ext>
             </a:extLst>
           </p:cNvPr>
@@ -6713,14 +6722,19 @@
             <p:ph type="title"/>
           </p:nvPr>
         </p:nvSpPr>
-        <p:spPr/>
+        <p:spPr>
+          <a:xfrm>
+            <a:off x="838200" y="365125"/>
+            <a:ext cx="7118131" cy="1325563"/>
+          </a:xfrm>
+        </p:spPr>
         <p:txBody>
           <a:bodyPr/>
           <a:lstStyle/>
           <a:p>
             <a:r>
               <a:rPr lang="en-US" dirty="0"/>
-              <a:t>Conclusion</a:t>
+              <a:t>2nd/3rd Ranked Models’ Plots Compared to the Truth Values</a:t>
             </a:r>
           </a:p>
         </p:txBody>
@@ -6730,7 +6744,7 @@
           <p:cNvPr id="3" name="Content Placeholder 2">
             <a:extLst>
               <a:ext uri="{FF2B5EF4-FFF2-40B4-BE49-F238E27FC236}">
-                <a16:creationId xmlns:a16="http://schemas.microsoft.com/office/drawing/2014/main" id="{B95C789F-527E-DA16-A8C4-52753BC3FA42}"/>
+                <a16:creationId xmlns:a16="http://schemas.microsoft.com/office/drawing/2014/main" id="{08C727E2-2A3C-EEDA-82B7-FD4582A61BF2}"/>
               </a:ext>
             </a:extLst>
           </p:cNvPr>
@@ -6741,54 +6755,132 @@
             <p:ph idx="1"/>
           </p:nvPr>
         </p:nvSpPr>
-        <p:spPr/>
+        <p:spPr>
+          <a:xfrm>
+            <a:off x="801413" y="1690688"/>
+            <a:ext cx="7764518" cy="4899298"/>
+          </a:xfrm>
+        </p:spPr>
         <p:txBody>
           <a:bodyPr/>
           <a:lstStyle/>
           <a:p>
             <a:r>
               <a:rPr lang="en-US" dirty="0"/>
-              <a:t>While all four models performed great, there were some that clearly worked better on our dataset.  The ranking of the four models used on our data is ANN in 1</a:t>
-            </a:r>
-            <a:r>
-              <a:rPr lang="en-US" baseline="30000" dirty="0"/>
-              <a:t>st</a:t>
-            </a:r>
-            <a:r>
-              <a:rPr lang="en-US" dirty="0"/>
-              <a:t> place, SVM in 2</a:t>
-            </a:r>
-            <a:r>
-              <a:rPr lang="en-US" baseline="30000" dirty="0"/>
-              <a:t>nd</a:t>
-            </a:r>
-            <a:r>
-              <a:rPr lang="en-US" dirty="0"/>
-              <a:t> place, DT in 3</a:t>
-            </a:r>
-            <a:r>
-              <a:rPr lang="en-US" baseline="30000" dirty="0"/>
-              <a:t>rd</a:t>
-            </a:r>
-            <a:r>
-              <a:rPr lang="en-US" dirty="0"/>
-              <a:t> place, and KNN in 4</a:t>
-            </a:r>
-            <a:r>
-              <a:rPr lang="en-US" baseline="30000" dirty="0"/>
-              <a:t>th</a:t>
-            </a:r>
-            <a:r>
-              <a:rPr lang="en-US" dirty="0"/>
-              <a:t> place.  This ranking is specifically for our data, so it does not imply that these are better overall.  While KNN was not perfect for our dataset due to its structure, it may be the best model for other datasets.</a:t>
-            </a:r>
-          </a:p>
-        </p:txBody>
-      </p:sp>
+              <a:t>For the 2nd (SVM) and 3rd (DT) ranked models’ plots, we can see that there is not much difference between the two plots with both plots having some error in their classifications of some datapoints.  For example, both models classified the datapoint near (22, 0) differently with SVM classifying it correctly.  Little difference between the two is expected since their accuracy scores only differed by around 0.03.</a:t>
+            </a:r>
+          </a:p>
+        </p:txBody>
+      </p:sp>
+      <p:pic>
+        <p:nvPicPr>
+          <p:cNvPr id="9" name="Picture 8" descr="A diagram of a graph&#10;&#10;AI-generated content may be incorrect.">
+            <a:extLst>
+              <a:ext uri="{FF2B5EF4-FFF2-40B4-BE49-F238E27FC236}">
+                <a16:creationId xmlns:a16="http://schemas.microsoft.com/office/drawing/2014/main" id="{B83C2429-AF7F-FA1B-DC75-A11B788BBB3E}"/>
+              </a:ext>
+            </a:extLst>
+          </p:cNvPr>
+          <p:cNvPicPr>
+            <a:picLocks noChangeAspect="1"/>
+          </p:cNvPicPr>
+          <p:nvPr/>
+        </p:nvPicPr>
+        <p:blipFill>
+          <a:blip r:embed="rId2">
+            <a:extLst>
+              <a:ext uri="{28A0092B-C50C-407E-A947-70E740481C1C}">
+                <a14:useLocalDpi xmlns:a14="http://schemas.microsoft.com/office/drawing/2010/main" val="0"/>
+              </a:ext>
+            </a:extLst>
+          </a:blip>
+          <a:srcRect l="3376" t="7232" r="8980" b="3209"/>
+          <a:stretch/>
+        </p:blipFill>
+        <p:spPr>
+          <a:xfrm>
+            <a:off x="9174074" y="57806"/>
+            <a:ext cx="2910330" cy="2230458"/>
+          </a:xfrm>
+          <a:prstGeom prst="rect">
+            <a:avLst/>
+          </a:prstGeom>
+        </p:spPr>
+      </p:pic>
+      <p:pic>
+        <p:nvPicPr>
+          <p:cNvPr id="4" name="Picture 3" descr="A chart with blue and orange dots&#10;&#10;AI-generated content may be incorrect.">
+            <a:extLst>
+              <a:ext uri="{FF2B5EF4-FFF2-40B4-BE49-F238E27FC236}">
+                <a16:creationId xmlns:a16="http://schemas.microsoft.com/office/drawing/2014/main" id="{81549E9A-4FCF-6D10-4651-BD77656AA97E}"/>
+              </a:ext>
+            </a:extLst>
+          </p:cNvPr>
+          <p:cNvPicPr>
+            <a:picLocks noChangeAspect="1"/>
+          </p:cNvPicPr>
+          <p:nvPr/>
+        </p:nvPicPr>
+        <p:blipFill>
+          <a:blip r:embed="rId3">
+            <a:extLst>
+              <a:ext uri="{28A0092B-C50C-407E-A947-70E740481C1C}">
+                <a14:useLocalDpi xmlns:a14="http://schemas.microsoft.com/office/drawing/2010/main" val="0"/>
+              </a:ext>
+            </a:extLst>
+          </a:blip>
+          <a:srcRect l="9051" t="7136" r="8765" b="6849"/>
+          <a:stretch/>
+        </p:blipFill>
+        <p:spPr>
+          <a:xfrm>
+            <a:off x="9334085" y="2326374"/>
+            <a:ext cx="2857915" cy="2243364"/>
+          </a:xfrm>
+          <a:prstGeom prst="rect">
+            <a:avLst/>
+          </a:prstGeom>
+        </p:spPr>
+      </p:pic>
+      <p:pic>
+        <p:nvPicPr>
+          <p:cNvPr id="6" name="Picture 5" descr="A chart with blue and orange dots&#10;&#10;AI-generated content may be incorrect.">
+            <a:extLst>
+              <a:ext uri="{FF2B5EF4-FFF2-40B4-BE49-F238E27FC236}">
+                <a16:creationId xmlns:a16="http://schemas.microsoft.com/office/drawing/2014/main" id="{78237B39-7D11-4644-4054-BE09116C7739}"/>
+              </a:ext>
+            </a:extLst>
+          </p:cNvPr>
+          <p:cNvPicPr>
+            <a:picLocks noChangeAspect="1"/>
+          </p:cNvPicPr>
+          <p:nvPr/>
+        </p:nvPicPr>
+        <p:blipFill>
+          <a:blip r:embed="rId4">
+            <a:extLst>
+              <a:ext uri="{28A0092B-C50C-407E-A947-70E740481C1C}">
+                <a14:useLocalDpi xmlns:a14="http://schemas.microsoft.com/office/drawing/2010/main" val="0"/>
+              </a:ext>
+            </a:extLst>
+          </a:blip>
+          <a:srcRect l="6610" t="5650" r="8262" b="6657"/>
+          <a:stretch/>
+        </p:blipFill>
+        <p:spPr>
+          <a:xfrm>
+            <a:off x="9288314" y="4614637"/>
+            <a:ext cx="2903686" cy="2243363"/>
+          </a:xfrm>
+          <a:prstGeom prst="rect">
+            <a:avLst/>
+          </a:prstGeom>
+        </p:spPr>
+      </p:pic>
     </p:spTree>
     <p:extLst>
       <p:ext uri="{BB962C8B-B14F-4D97-AF65-F5344CB8AC3E}">
-        <p14:creationId xmlns:p14="http://schemas.microsoft.com/office/powerpoint/2010/main" val="3744284342"/>
+        <p14:creationId xmlns:p14="http://schemas.microsoft.com/office/powerpoint/2010/main" val="2182013409"/>
       </p:ext>
     </p:extLst>
   </p:cSld>
@@ -6891,6 +6983,604 @@
 </file>
 
 <file path=ppt/slides/slide30.xml><?xml version="1.0" encoding="utf-8"?>
+<p:sld xmlns:a="http://schemas.openxmlformats.org/drawingml/2006/main" xmlns:r="http://schemas.openxmlformats.org/officeDocument/2006/relationships" xmlns:p="http://schemas.openxmlformats.org/presentationml/2006/main">
+  <p:cSld>
+    <p:spTree>
+      <p:nvGrpSpPr>
+        <p:cNvPr id="1" name=""/>
+        <p:cNvGrpSpPr/>
+        <p:nvPr/>
+      </p:nvGrpSpPr>
+      <p:grpSpPr>
+        <a:xfrm>
+          <a:off x="0" y="0"/>
+          <a:ext cx="0" cy="0"/>
+          <a:chOff x="0" y="0"/>
+          <a:chExt cx="0" cy="0"/>
+        </a:xfrm>
+      </p:grpSpPr>
+      <p:sp>
+        <p:nvSpPr>
+          <p:cNvPr id="2" name="Title 1">
+            <a:extLst>
+              <a:ext uri="{FF2B5EF4-FFF2-40B4-BE49-F238E27FC236}">
+                <a16:creationId xmlns:a16="http://schemas.microsoft.com/office/drawing/2014/main" id="{227830F3-B9FA-D022-D7ED-A2555D3BB36C}"/>
+              </a:ext>
+            </a:extLst>
+          </p:cNvPr>
+          <p:cNvSpPr>
+            <a:spLocks noGrp="1"/>
+          </p:cNvSpPr>
+          <p:nvPr>
+            <p:ph type="title"/>
+          </p:nvPr>
+        </p:nvSpPr>
+        <p:spPr/>
+        <p:txBody>
+          <a:bodyPr/>
+          <a:lstStyle/>
+          <a:p>
+            <a:r>
+              <a:rPr lang="en-US" dirty="0"/>
+              <a:t>Model ROC/AUC Comparison</a:t>
+            </a:r>
+          </a:p>
+        </p:txBody>
+      </p:sp>
+      <p:sp>
+        <p:nvSpPr>
+          <p:cNvPr id="3" name="Content Placeholder 2">
+            <a:extLst>
+              <a:ext uri="{FF2B5EF4-FFF2-40B4-BE49-F238E27FC236}">
+                <a16:creationId xmlns:a16="http://schemas.microsoft.com/office/drawing/2014/main" id="{52CDC84B-C5E6-4469-0177-736209E689B5}"/>
+              </a:ext>
+            </a:extLst>
+          </p:cNvPr>
+          <p:cNvSpPr>
+            <a:spLocks noGrp="1"/>
+          </p:cNvSpPr>
+          <p:nvPr>
+            <p:ph idx="1"/>
+          </p:nvPr>
+        </p:nvSpPr>
+        <p:spPr>
+          <a:xfrm>
+            <a:off x="838200" y="1825625"/>
+            <a:ext cx="10515600" cy="2625506"/>
+          </a:xfrm>
+        </p:spPr>
+        <p:txBody>
+          <a:bodyPr>
+            <a:normAutofit fontScale="92500" lnSpcReduction="20000"/>
+          </a:bodyPr>
+          <a:lstStyle/>
+          <a:p>
+            <a:r>
+              <a:rPr lang="en-US" dirty="0"/>
+              <a:t>By comparing the ROC curves—more specifically, the AUC scores—of the four models, we can further determine which models performed better than others.  For example, our best model, ANN, has the highest AUC score of 0.995 with our 2</a:t>
+            </a:r>
+            <a:r>
+              <a:rPr lang="en-US" baseline="30000" dirty="0"/>
+              <a:t>nd</a:t>
+            </a:r>
+            <a:r>
+              <a:rPr lang="en-US" dirty="0"/>
+              <a:t> best model, SVM, following behind ANN with an AUC score of 0.991.  Curiously, our DT, although performing better overall than our KNN model, has the lowest AUC score of 0.913 following behind KNN’s AUC score of 0.943.  It is best to note, however, that all four of these scores are excellent.</a:t>
+            </a:r>
+          </a:p>
+        </p:txBody>
+      </p:sp>
+      <p:pic>
+        <p:nvPicPr>
+          <p:cNvPr id="4" name="Picture 3" descr="A graph of a function&#10;&#10;AI-generated content may be incorrect.">
+            <a:extLst>
+              <a:ext uri="{FF2B5EF4-FFF2-40B4-BE49-F238E27FC236}">
+                <a16:creationId xmlns:a16="http://schemas.microsoft.com/office/drawing/2014/main" id="{CA7A2E9F-C642-7D28-F5AF-F85AA818BC2B}"/>
+              </a:ext>
+            </a:extLst>
+          </p:cNvPr>
+          <p:cNvPicPr>
+            <a:picLocks noChangeAspect="1"/>
+          </p:cNvPicPr>
+          <p:nvPr/>
+        </p:nvPicPr>
+        <p:blipFill>
+          <a:blip r:embed="rId2">
+            <a:extLst>
+              <a:ext uri="{28A0092B-C50C-407E-A947-70E740481C1C}">
+                <a14:useLocalDpi xmlns:a14="http://schemas.microsoft.com/office/drawing/2010/main" val="0"/>
+              </a:ext>
+            </a:extLst>
+          </a:blip>
+          <a:srcRect l="4669" t="7280" r="8405" b="3640"/>
+          <a:stretch/>
+        </p:blipFill>
+        <p:spPr>
+          <a:xfrm>
+            <a:off x="9073475" y="4534009"/>
+            <a:ext cx="3023688" cy="2323991"/>
+          </a:xfrm>
+          <a:prstGeom prst="rect">
+            <a:avLst/>
+          </a:prstGeom>
+        </p:spPr>
+      </p:pic>
+      <p:pic>
+        <p:nvPicPr>
+          <p:cNvPr id="5" name="Picture 4" descr="A graph of a function&#10;&#10;AI-generated content may be incorrect.">
+            <a:extLst>
+              <a:ext uri="{FF2B5EF4-FFF2-40B4-BE49-F238E27FC236}">
+                <a16:creationId xmlns:a16="http://schemas.microsoft.com/office/drawing/2014/main" id="{6018AE0F-916A-67E2-63AC-799C6168B363}"/>
+              </a:ext>
+            </a:extLst>
+          </p:cNvPr>
+          <p:cNvPicPr>
+            <a:picLocks noChangeAspect="1"/>
+          </p:cNvPicPr>
+          <p:nvPr/>
+        </p:nvPicPr>
+        <p:blipFill>
+          <a:blip r:embed="rId3">
+            <a:extLst>
+              <a:ext uri="{28A0092B-C50C-407E-A947-70E740481C1C}">
+                <a14:useLocalDpi xmlns:a14="http://schemas.microsoft.com/office/drawing/2010/main" val="0"/>
+              </a:ext>
+            </a:extLst>
+          </a:blip>
+          <a:srcRect l="5378" t="6997" r="7940" b="2708"/>
+          <a:stretch/>
+        </p:blipFill>
+        <p:spPr>
+          <a:xfrm>
+            <a:off x="6105492" y="4534009"/>
+            <a:ext cx="2967983" cy="2318737"/>
+          </a:xfrm>
+          <a:prstGeom prst="rect">
+            <a:avLst/>
+          </a:prstGeom>
+        </p:spPr>
+      </p:pic>
+      <p:pic>
+        <p:nvPicPr>
+          <p:cNvPr id="6" name="Picture 5" descr="A graph with a line and a blue line&#10;&#10;AI-generated content may be incorrect.">
+            <a:extLst>
+              <a:ext uri="{FF2B5EF4-FFF2-40B4-BE49-F238E27FC236}">
+                <a16:creationId xmlns:a16="http://schemas.microsoft.com/office/drawing/2014/main" id="{C64CEDB2-ACC2-9AA4-1749-3A409B4897DC}"/>
+              </a:ext>
+            </a:extLst>
+          </p:cNvPr>
+          <p:cNvPicPr>
+            <a:picLocks noChangeAspect="1"/>
+          </p:cNvPicPr>
+          <p:nvPr/>
+        </p:nvPicPr>
+        <p:blipFill>
+          <a:blip r:embed="rId4">
+            <a:extLst>
+              <a:ext uri="{28A0092B-C50C-407E-A947-70E740481C1C}">
+                <a14:useLocalDpi xmlns:a14="http://schemas.microsoft.com/office/drawing/2010/main" val="0"/>
+              </a:ext>
+            </a:extLst>
+          </a:blip>
+          <a:srcRect l="4741" t="7281" r="8118" b="3065"/>
+          <a:stretch/>
+        </p:blipFill>
+        <p:spPr>
+          <a:xfrm>
+            <a:off x="3100548" y="4534009"/>
+            <a:ext cx="3004945" cy="2318736"/>
+          </a:xfrm>
+          <a:prstGeom prst="rect">
+            <a:avLst/>
+          </a:prstGeom>
+        </p:spPr>
+      </p:pic>
+      <p:pic>
+        <p:nvPicPr>
+          <p:cNvPr id="7" name="Picture 6" descr="A graph of a function&#10;&#10;AI-generated content may be incorrect.">
+            <a:extLst>
+              <a:ext uri="{FF2B5EF4-FFF2-40B4-BE49-F238E27FC236}">
+                <a16:creationId xmlns:a16="http://schemas.microsoft.com/office/drawing/2014/main" id="{5B56C855-0FC8-A451-B4DC-91099EFB7DBD}"/>
+              </a:ext>
+            </a:extLst>
+          </p:cNvPr>
+          <p:cNvPicPr>
+            <a:picLocks noChangeAspect="1"/>
+          </p:cNvPicPr>
+          <p:nvPr/>
+        </p:nvPicPr>
+        <p:blipFill>
+          <a:blip r:embed="rId5">
+            <a:extLst>
+              <a:ext uri="{28A0092B-C50C-407E-A947-70E740481C1C}">
+                <a14:useLocalDpi xmlns:a14="http://schemas.microsoft.com/office/drawing/2010/main" val="0"/>
+              </a:ext>
+            </a:extLst>
+          </a:blip>
+          <a:srcRect l="5508" t="7440" r="8549" b="2753"/>
+          <a:stretch/>
+        </p:blipFill>
+        <p:spPr>
+          <a:xfrm>
+            <a:off x="132566" y="4539264"/>
+            <a:ext cx="2958660" cy="2318736"/>
+          </a:xfrm>
+          <a:prstGeom prst="rect">
+            <a:avLst/>
+          </a:prstGeom>
+        </p:spPr>
+      </p:pic>
+    </p:spTree>
+    <p:extLst>
+      <p:ext uri="{BB962C8B-B14F-4D97-AF65-F5344CB8AC3E}">
+        <p14:creationId xmlns:p14="http://schemas.microsoft.com/office/powerpoint/2010/main" val="99919921"/>
+      </p:ext>
+    </p:extLst>
+  </p:cSld>
+  <p:clrMapOvr>
+    <a:masterClrMapping/>
+  </p:clrMapOvr>
+</p:sld>
+</file>
+
+<file path=ppt/slides/slide31.xml><?xml version="1.0" encoding="utf-8"?>
+<p:sld xmlns:a="http://schemas.openxmlformats.org/drawingml/2006/main" xmlns:r="http://schemas.openxmlformats.org/officeDocument/2006/relationships" xmlns:p="http://schemas.openxmlformats.org/presentationml/2006/main">
+  <p:cSld>
+    <p:spTree>
+      <p:nvGrpSpPr>
+        <p:cNvPr id="1" name="">
+          <a:extLst>
+            <a:ext uri="{FF2B5EF4-FFF2-40B4-BE49-F238E27FC236}">
+              <a16:creationId xmlns:a16="http://schemas.microsoft.com/office/drawing/2014/main" id="{73181F27-0B99-4F50-44C3-F392C553FE76}"/>
+            </a:ext>
+          </a:extLst>
+        </p:cNvPr>
+        <p:cNvGrpSpPr/>
+        <p:nvPr/>
+      </p:nvGrpSpPr>
+      <p:grpSpPr>
+        <a:xfrm>
+          <a:off x="0" y="0"/>
+          <a:ext cx="0" cy="0"/>
+          <a:chOff x="0" y="0"/>
+          <a:chExt cx="0" cy="0"/>
+        </a:xfrm>
+      </p:grpSpPr>
+      <p:sp>
+        <p:nvSpPr>
+          <p:cNvPr id="2" name="Title 1">
+            <a:extLst>
+              <a:ext uri="{FF2B5EF4-FFF2-40B4-BE49-F238E27FC236}">
+                <a16:creationId xmlns:a16="http://schemas.microsoft.com/office/drawing/2014/main" id="{73BD3554-36E9-0645-0BB4-CC6496DE0469}"/>
+              </a:ext>
+            </a:extLst>
+          </p:cNvPr>
+          <p:cNvSpPr>
+            <a:spLocks noGrp="1"/>
+          </p:cNvSpPr>
+          <p:nvPr>
+            <p:ph type="title"/>
+          </p:nvPr>
+        </p:nvSpPr>
+        <p:spPr/>
+        <p:txBody>
+          <a:bodyPr/>
+          <a:lstStyle/>
+          <a:p>
+            <a:r>
+              <a:rPr lang="en-US" dirty="0"/>
+              <a:t>Model Training/Validation Accuracy/Loss Curve Comparison</a:t>
+            </a:r>
+          </a:p>
+        </p:txBody>
+      </p:sp>
+      <p:sp>
+        <p:nvSpPr>
+          <p:cNvPr id="3" name="Content Placeholder 2">
+            <a:extLst>
+              <a:ext uri="{FF2B5EF4-FFF2-40B4-BE49-F238E27FC236}">
+                <a16:creationId xmlns:a16="http://schemas.microsoft.com/office/drawing/2014/main" id="{D630FE95-9033-3029-3540-7670B35A9348}"/>
+              </a:ext>
+            </a:extLst>
+          </p:cNvPr>
+          <p:cNvSpPr>
+            <a:spLocks noGrp="1"/>
+          </p:cNvSpPr>
+          <p:nvPr>
+            <p:ph idx="1"/>
+          </p:nvPr>
+        </p:nvSpPr>
+        <p:spPr>
+          <a:xfrm>
+            <a:off x="838200" y="1799165"/>
+            <a:ext cx="10515600" cy="2885074"/>
+          </a:xfrm>
+        </p:spPr>
+        <p:txBody>
+          <a:bodyPr>
+            <a:normAutofit fontScale="77500" lnSpcReduction="20000"/>
+          </a:bodyPr>
+          <a:lstStyle/>
+          <a:p>
+            <a:r>
+              <a:rPr lang="en-US" dirty="0"/>
+              <a:t>By comparing the Training/Validation Accuracy/Loss curves of all four models, we can discuss how the changing of parameters affected each model differently.  For starters, we can see that as the parameter values increase, DT performed better, ANN and SVM stayed relatively consistent, and KNN performed worse overall.  Additionally, we can see that our best model, ANN, had little fluctuation in its accuracy/validation values compared to the other models, and our worst performing model, KNN, had a large separation between the training and validation curves.  Additionally, while most models had little crossover, SVM had multiple points at which the curves intersected showing visually that its change in parameters hod little to no effect on its performance compared to the other three models.  Still, ANN performed the best out of the four models.</a:t>
+            </a:r>
+          </a:p>
+        </p:txBody>
+      </p:sp>
+      <p:pic>
+        <p:nvPicPr>
+          <p:cNvPr id="8" name="Picture 7" descr="A graph of a person&#10;&#10;AI-generated content may be incorrect.">
+            <a:extLst>
+              <a:ext uri="{FF2B5EF4-FFF2-40B4-BE49-F238E27FC236}">
+                <a16:creationId xmlns:a16="http://schemas.microsoft.com/office/drawing/2014/main" id="{1F5DE719-3916-DAEE-5F1B-47F2C7703FDC}"/>
+              </a:ext>
+            </a:extLst>
+          </p:cNvPr>
+          <p:cNvPicPr>
+            <a:picLocks noChangeAspect="1"/>
+          </p:cNvPicPr>
+          <p:nvPr/>
+        </p:nvPicPr>
+        <p:blipFill>
+          <a:blip r:embed="rId2">
+            <a:extLst>
+              <a:ext uri="{28A0092B-C50C-407E-A947-70E740481C1C}">
+                <a14:useLocalDpi xmlns:a14="http://schemas.microsoft.com/office/drawing/2010/main" val="0"/>
+              </a:ext>
+            </a:extLst>
+          </a:blip>
+          <a:srcRect l="7842" t="8200" r="8940" b="5211"/>
+          <a:stretch/>
+        </p:blipFill>
+        <p:spPr>
+          <a:xfrm>
+            <a:off x="9073474" y="4689495"/>
+            <a:ext cx="3118525" cy="2163249"/>
+          </a:xfrm>
+          <a:prstGeom prst="rect">
+            <a:avLst/>
+          </a:prstGeom>
+        </p:spPr>
+      </p:pic>
+      <p:pic>
+        <p:nvPicPr>
+          <p:cNvPr id="9" name="Picture 8" descr="A graph of a graph&#10;&#10;AI-generated content may be incorrect.">
+            <a:extLst>
+              <a:ext uri="{FF2B5EF4-FFF2-40B4-BE49-F238E27FC236}">
+                <a16:creationId xmlns:a16="http://schemas.microsoft.com/office/drawing/2014/main" id="{AA063F34-C07E-1D25-2403-2103A9DAA42F}"/>
+              </a:ext>
+            </a:extLst>
+          </p:cNvPr>
+          <p:cNvPicPr>
+            <a:picLocks noChangeAspect="1"/>
+          </p:cNvPicPr>
+          <p:nvPr/>
+        </p:nvPicPr>
+        <p:blipFill>
+          <a:blip r:embed="rId3">
+            <a:extLst>
+              <a:ext uri="{28A0092B-C50C-407E-A947-70E740481C1C}">
+                <a14:useLocalDpi xmlns:a14="http://schemas.microsoft.com/office/drawing/2010/main" val="0"/>
+              </a:ext>
+            </a:extLst>
+          </a:blip>
+          <a:srcRect l="7636" t="8812" r="8327" b="4828"/>
+          <a:stretch/>
+        </p:blipFill>
+        <p:spPr>
+          <a:xfrm>
+            <a:off x="6114816" y="4797972"/>
+            <a:ext cx="2999202" cy="2054772"/>
+          </a:xfrm>
+          <a:prstGeom prst="rect">
+            <a:avLst/>
+          </a:prstGeom>
+        </p:spPr>
+      </p:pic>
+      <p:pic>
+        <p:nvPicPr>
+          <p:cNvPr id="10" name="Picture 9" descr="A graph of a number of colored lines&#10;&#10;AI-generated content may be incorrect.">
+            <a:extLst>
+              <a:ext uri="{FF2B5EF4-FFF2-40B4-BE49-F238E27FC236}">
+                <a16:creationId xmlns:a16="http://schemas.microsoft.com/office/drawing/2014/main" id="{B696D530-E34F-F9DD-5C79-076B4CA26CDE}"/>
+              </a:ext>
+            </a:extLst>
+          </p:cNvPr>
+          <p:cNvPicPr>
+            <a:picLocks noChangeAspect="1"/>
+          </p:cNvPicPr>
+          <p:nvPr/>
+        </p:nvPicPr>
+        <p:blipFill>
+          <a:blip r:embed="rId4">
+            <a:extLst>
+              <a:ext uri="{28A0092B-C50C-407E-A947-70E740481C1C}">
+                <a14:useLocalDpi xmlns:a14="http://schemas.microsoft.com/office/drawing/2010/main" val="0"/>
+              </a:ext>
+            </a:extLst>
+          </a:blip>
+          <a:srcRect l="6715" t="7486" r="8793" b="3743"/>
+          <a:stretch/>
+        </p:blipFill>
+        <p:spPr>
+          <a:xfrm>
+            <a:off x="3068538" y="4750676"/>
+            <a:ext cx="3008647" cy="2107324"/>
+          </a:xfrm>
+          <a:prstGeom prst="rect">
+            <a:avLst/>
+          </a:prstGeom>
+        </p:spPr>
+      </p:pic>
+      <p:pic>
+        <p:nvPicPr>
+          <p:cNvPr id="11" name="Picture 10" descr="A graph of different colored lines&#10;&#10;AI-generated content may be incorrect.">
+            <a:extLst>
+              <a:ext uri="{FF2B5EF4-FFF2-40B4-BE49-F238E27FC236}">
+                <a16:creationId xmlns:a16="http://schemas.microsoft.com/office/drawing/2014/main" id="{FC57D3E5-771D-79CB-21F5-0B9145B76C62}"/>
+              </a:ext>
+            </a:extLst>
+          </p:cNvPr>
+          <p:cNvPicPr>
+            <a:picLocks noChangeAspect="1"/>
+          </p:cNvPicPr>
+          <p:nvPr/>
+        </p:nvPicPr>
+        <p:blipFill>
+          <a:blip r:embed="rId5">
+            <a:extLst>
+              <a:ext uri="{28A0092B-C50C-407E-A947-70E740481C1C}">
+                <a14:useLocalDpi xmlns:a14="http://schemas.microsoft.com/office/drawing/2010/main" val="0"/>
+              </a:ext>
+            </a:extLst>
+          </a:blip>
+          <a:srcRect l="7569" t="8120" r="8120" b="5113"/>
+          <a:stretch/>
+        </p:blipFill>
+        <p:spPr>
+          <a:xfrm>
+            <a:off x="57806" y="4750676"/>
+            <a:ext cx="3063847" cy="2102068"/>
+          </a:xfrm>
+          <a:prstGeom prst="rect">
+            <a:avLst/>
+          </a:prstGeom>
+        </p:spPr>
+      </p:pic>
+    </p:spTree>
+    <p:extLst>
+      <p:ext uri="{BB962C8B-B14F-4D97-AF65-F5344CB8AC3E}">
+        <p14:creationId xmlns:p14="http://schemas.microsoft.com/office/powerpoint/2010/main" val="176691558"/>
+      </p:ext>
+    </p:extLst>
+  </p:cSld>
+  <p:clrMapOvr>
+    <a:masterClrMapping/>
+  </p:clrMapOvr>
+</p:sld>
+</file>
+
+<file path=ppt/slides/slide32.xml><?xml version="1.0" encoding="utf-8"?>
+<p:sld xmlns:a="http://schemas.openxmlformats.org/drawingml/2006/main" xmlns:r="http://schemas.openxmlformats.org/officeDocument/2006/relationships" xmlns:p="http://schemas.openxmlformats.org/presentationml/2006/main">
+  <p:cSld>
+    <p:spTree>
+      <p:nvGrpSpPr>
+        <p:cNvPr id="1" name=""/>
+        <p:cNvGrpSpPr/>
+        <p:nvPr/>
+      </p:nvGrpSpPr>
+      <p:grpSpPr>
+        <a:xfrm>
+          <a:off x="0" y="0"/>
+          <a:ext cx="0" cy="0"/>
+          <a:chOff x="0" y="0"/>
+          <a:chExt cx="0" cy="0"/>
+        </a:xfrm>
+      </p:grpSpPr>
+      <p:sp>
+        <p:nvSpPr>
+          <p:cNvPr id="2" name="Title 1">
+            <a:extLst>
+              <a:ext uri="{FF2B5EF4-FFF2-40B4-BE49-F238E27FC236}">
+                <a16:creationId xmlns:a16="http://schemas.microsoft.com/office/drawing/2014/main" id="{B4D94AE6-0DAB-25A2-52EA-C2C4643A9865}"/>
+              </a:ext>
+            </a:extLst>
+          </p:cNvPr>
+          <p:cNvSpPr>
+            <a:spLocks noGrp="1"/>
+          </p:cNvSpPr>
+          <p:nvPr>
+            <p:ph type="title"/>
+          </p:nvPr>
+        </p:nvSpPr>
+        <p:spPr/>
+        <p:txBody>
+          <a:bodyPr/>
+          <a:lstStyle/>
+          <a:p>
+            <a:r>
+              <a:rPr lang="en-US" dirty="0"/>
+              <a:t>Conclusion</a:t>
+            </a:r>
+          </a:p>
+        </p:txBody>
+      </p:sp>
+      <p:sp>
+        <p:nvSpPr>
+          <p:cNvPr id="3" name="Content Placeholder 2">
+            <a:extLst>
+              <a:ext uri="{FF2B5EF4-FFF2-40B4-BE49-F238E27FC236}">
+                <a16:creationId xmlns:a16="http://schemas.microsoft.com/office/drawing/2014/main" id="{B95C789F-527E-DA16-A8C4-52753BC3FA42}"/>
+              </a:ext>
+            </a:extLst>
+          </p:cNvPr>
+          <p:cNvSpPr>
+            <a:spLocks noGrp="1"/>
+          </p:cNvSpPr>
+          <p:nvPr>
+            <p:ph idx="1"/>
+          </p:nvPr>
+        </p:nvSpPr>
+        <p:spPr/>
+        <p:txBody>
+          <a:bodyPr/>
+          <a:lstStyle/>
+          <a:p>
+            <a:r>
+              <a:rPr lang="en-US" dirty="0"/>
+              <a:t>While all four models performed great, there were some that clearly worked better on our dataset.  The models’ performance score showed us that the ranking of the four models used on our data is ANN in 1</a:t>
+            </a:r>
+            <a:r>
+              <a:rPr lang="en-US" baseline="30000" dirty="0"/>
+              <a:t>st</a:t>
+            </a:r>
+            <a:r>
+              <a:rPr lang="en-US" dirty="0"/>
+              <a:t> place, SVM in 2</a:t>
+            </a:r>
+            <a:r>
+              <a:rPr lang="en-US" baseline="30000" dirty="0"/>
+              <a:t>nd</a:t>
+            </a:r>
+            <a:r>
+              <a:rPr lang="en-US" dirty="0"/>
+              <a:t> place, DT in 3</a:t>
+            </a:r>
+            <a:r>
+              <a:rPr lang="en-US" baseline="30000" dirty="0"/>
+              <a:t>rd</a:t>
+            </a:r>
+            <a:r>
+              <a:rPr lang="en-US" dirty="0"/>
+              <a:t> place, and KNN in 4</a:t>
+            </a:r>
+            <a:r>
+              <a:rPr lang="en-US" baseline="30000" dirty="0"/>
+              <a:t>th</a:t>
+            </a:r>
+            <a:r>
+              <a:rPr lang="en-US" dirty="0"/>
+              <a:t> place.  The ROC/AUC and Training/Validation curves further enforced this ranking as shown previously.  This ranking, however, is specifically for our data, so it does not imply that these are better overall.  While ANN performed the best on our data, it may struggle on other datasets where the other models may be superior.</a:t>
+            </a:r>
+          </a:p>
+        </p:txBody>
+      </p:sp>
+    </p:spTree>
+    <p:extLst>
+      <p:ext uri="{BB962C8B-B14F-4D97-AF65-F5344CB8AC3E}">
+        <p14:creationId xmlns:p14="http://schemas.microsoft.com/office/powerpoint/2010/main" val="3744284342"/>
+      </p:ext>
+    </p:extLst>
+  </p:cSld>
+  <p:clrMapOvr>
+    <a:masterClrMapping/>
+  </p:clrMapOvr>
+</p:sld>
+</file>
+
+<file path=ppt/slides/slide33.xml><?xml version="1.0" encoding="utf-8"?>
 <p:sld xmlns:a="http://schemas.openxmlformats.org/drawingml/2006/main" xmlns:r="http://schemas.openxmlformats.org/officeDocument/2006/relationships" xmlns:p="http://schemas.openxmlformats.org/presentationml/2006/main">
   <p:cSld>
     <p:spTree>
@@ -8502,7 +9192,7 @@
           <a:p>
             <a:r>
               <a:rPr lang="en-US" dirty="0"/>
-              <a:t>A snapshot of the dataset can be seen to the right.  As seen in the table, the attributes of the dataset are floats containing the TF-IDF scores of each word in each datapoint.</a:t>
+              <a:t>A snapshot of the dataset can be seen to the right.  As seen in the table, the attributes of the dataset are floats containing the TF-IDF scores of each word in each datapoint.  This will allow us to classify new data by comparing the new data’s TF-IDF scores to the training data’s TF-IDF scores.</a:t>
             </a:r>
           </a:p>
         </p:txBody>
